--- a/MPG_PeopleAnalytics_Executive.pptx
+++ b/MPG_PeopleAnalytics_Executive.pptx
@@ -156,31 +156,31 @@
               <c:strCache>
                 <c:ptCount val="9"/>
                 <c:pt idx="0">
-                  <c:v>Dublin</c:v>
+                  <c:v>San Francisco</c:v>
                 </c:pt>
                 <c:pt idx="1">
-                  <c:v>Singapore</c:v>
+                  <c:v>Mexico City</c:v>
                 </c:pt>
                 <c:pt idx="2">
-                  <c:v>New York</c:v>
+                  <c:v>São Paulo</c:v>
                 </c:pt>
                 <c:pt idx="3">
-                  <c:v>Bogotá</c:v>
+                  <c:v>Miami</c:v>
                 </c:pt>
                 <c:pt idx="4">
                   <c:v>London</c:v>
                 </c:pt>
                 <c:pt idx="5">
-                  <c:v>Miami</c:v>
+                  <c:v>Bogotá</c:v>
                 </c:pt>
                 <c:pt idx="6">
-                  <c:v>São Paulo</c:v>
+                  <c:v>New York</c:v>
                 </c:pt>
                 <c:pt idx="7">
-                  <c:v>Mexico City</c:v>
+                  <c:v>Singapore</c:v>
                 </c:pt>
                 <c:pt idx="8">
-                  <c:v>San Francisco</c:v>
+                  <c:v>Dublin</c:v>
                 </c:pt>
               </c:strCache>
             </c:strRef>
@@ -189,41 +189,41 @@
             <c:numRef>
               <c:f>Sheet1!$B$2:$B$10</c:f>
               <c:numCache>
-                <c:formatCode>#,##0.0</c:formatCode>
+                <c:formatCode>[$-409]#,##0.0</c:formatCode>
                 <c:ptCount val="9"/>
                 <c:pt idx="0">
-                  <c:v>13.5</c:v>
+                  <c:v>4.5</c:v>
                 </c:pt>
                 <c:pt idx="1">
-                  <c:v>13.4</c:v>
+                  <c:v>4.9</c:v>
                 </c:pt>
                 <c:pt idx="2">
-                  <c:v>10.2</c:v>
+                  <c:v>5.4</c:v>
                 </c:pt>
                 <c:pt idx="3">
-                  <c:v>9.7</c:v>
+                  <c:v>7.1</c:v>
                 </c:pt>
                 <c:pt idx="4">
                   <c:v>9.2</c:v>
                 </c:pt>
                 <c:pt idx="5">
-                  <c:v>7.1</c:v>
+                  <c:v>9.7</c:v>
                 </c:pt>
                 <c:pt idx="6">
-                  <c:v>5.4</c:v>
+                  <c:v>10.2</c:v>
                 </c:pt>
                 <c:pt idx="7">
-                  <c:v>4.9</c:v>
+                  <c:v>13.4</c:v>
                 </c:pt>
                 <c:pt idx="8">
-                  <c:v>4.5</c:v>
+                  <c:v>13.5</c:v>
                 </c:pt>
               </c:numCache>
             </c:numRef>
           </c:val>
         </c:ser>
         <c:dLbls>
-          <c:numFmt formatCode="#,##0.0" sourceLinked="0"/>
+          <c:numFmt formatCode="[$-409]#,##0.0" sourceLinked="0"/>
           <c:txPr>
             <a:bodyPr/>
             <a:lstStyle/>
@@ -358,31 +358,31 @@
               <c:strCache>
                 <c:ptCount val="9"/>
                 <c:pt idx="0">
-                  <c:v>Dublin</c:v>
+                  <c:v>San Francisco</c:v>
                 </c:pt>
                 <c:pt idx="1">
-                  <c:v>Singapore</c:v>
+                  <c:v>Mexico City</c:v>
                 </c:pt>
                 <c:pt idx="2">
-                  <c:v>New York</c:v>
+                  <c:v>São Paulo</c:v>
                 </c:pt>
                 <c:pt idx="3">
-                  <c:v>Bogotá</c:v>
+                  <c:v>Miami</c:v>
                 </c:pt>
                 <c:pt idx="4">
                   <c:v>London</c:v>
                 </c:pt>
                 <c:pt idx="5">
-                  <c:v>Miami</c:v>
+                  <c:v>Bogotá</c:v>
                 </c:pt>
                 <c:pt idx="6">
-                  <c:v>São Paulo</c:v>
+                  <c:v>New York</c:v>
                 </c:pt>
                 <c:pt idx="7">
-                  <c:v>Mexico City</c:v>
+                  <c:v>Singapore</c:v>
                 </c:pt>
                 <c:pt idx="8">
-                  <c:v>San Francisco</c:v>
+                  <c:v>Dublin</c:v>
                 </c:pt>
               </c:strCache>
             </c:strRef>
@@ -391,41 +391,41 @@
             <c:numRef>
               <c:f>Sheet1!$B$2:$B$10</c:f>
               <c:numCache>
-                <c:formatCode>#,##0</c:formatCode>
+                <c:formatCode>[$-409]#,##0</c:formatCode>
                 <c:ptCount val="9"/>
                 <c:pt idx="0">
-                  <c:v>79</c:v>
+                  <c:v>22</c:v>
                 </c:pt>
                 <c:pt idx="1">
-                  <c:v>97</c:v>
+                  <c:v>54</c:v>
                 </c:pt>
                 <c:pt idx="2">
-                  <c:v>51</c:v>
+                  <c:v>55</c:v>
                 </c:pt>
                 <c:pt idx="3">
-                  <c:v>148</c:v>
+                  <c:v>46</c:v>
                 </c:pt>
                 <c:pt idx="4">
                   <c:v>47</c:v>
                 </c:pt>
                 <c:pt idx="5">
-                  <c:v>46</c:v>
+                  <c:v>148</c:v>
                 </c:pt>
                 <c:pt idx="6">
-                  <c:v>55</c:v>
+                  <c:v>51</c:v>
                 </c:pt>
                 <c:pt idx="7">
-                  <c:v>54</c:v>
+                  <c:v>97</c:v>
                 </c:pt>
                 <c:pt idx="8">
-                  <c:v>22</c:v>
+                  <c:v>79</c:v>
                 </c:pt>
               </c:numCache>
             </c:numRef>
           </c:val>
         </c:ser>
         <c:dLbls>
-          <c:numFmt formatCode="#,##0" sourceLinked="0"/>
+          <c:numFmt formatCode="[$-409]#,##0" sourceLinked="0"/>
           <c:txPr>
             <a:bodyPr/>
             <a:lstStyle/>
@@ -549,11 +549,22 @@
               </c:strCache>
             </c:strRef>
           </c:tx>
-          <c:spPr>
-            <a:solidFill>
-              <a:srgbClr val="96691A"/>
-            </a:solidFill>
-          </c:spPr>
+          <c:dPt>
+            <c:idx val="0"/>
+            <c:spPr>
+              <a:solidFill>
+                <a:srgbClr val="96691A"/>
+              </a:solidFill>
+            </c:spPr>
+          </c:dPt>
+          <c:dPt>
+            <c:idx val="1"/>
+            <c:spPr>
+              <a:solidFill>
+                <a:srgbClr val="001552"/>
+              </a:solidFill>
+            </c:spPr>
+          </c:dPt>
           <c:cat>
             <c:strRef>
               <c:f>Sheet1!$A$2:$A$3</c:f>
@@ -572,7 +583,7 @@
             <c:numRef>
               <c:f>Sheet1!$B$2:$B$3</c:f>
               <c:numCache>
-                <c:formatCode>$#,##0.00"M"</c:formatCode>
+                <c:formatCode>[$-409]$#,##0.00"M"</c:formatCode>
                 <c:ptCount val="2"/>
                 <c:pt idx="0">
                   <c:v>5.11</c:v>
@@ -585,7 +596,7 @@
           </c:val>
         </c:ser>
         <c:dLbls>
-          <c:numFmt formatCode="$#,##0.00&quot;M&quot;" sourceLinked="0"/>
+          <c:numFmt formatCode="[$-409]$#,##0.00&quot;M&quot;" sourceLinked="0"/>
           <c:txPr>
             <a:bodyPr/>
             <a:lstStyle/>
@@ -709,11 +720,30 @@
               </c:strCache>
             </c:strRef>
           </c:tx>
-          <c:spPr>
-            <a:solidFill>
-              <a:srgbClr val="9CBCE8"/>
-            </a:solidFill>
-          </c:spPr>
+          <c:dPt>
+            <c:idx val="0"/>
+            <c:spPr>
+              <a:solidFill>
+                <a:srgbClr val="9CBCE8"/>
+              </a:solidFill>
+            </c:spPr>
+          </c:dPt>
+          <c:dPt>
+            <c:idx val="1"/>
+            <c:spPr>
+              <a:solidFill>
+                <a:srgbClr val="3E72C4"/>
+              </a:solidFill>
+            </c:spPr>
+          </c:dPt>
+          <c:dPt>
+            <c:idx val="2"/>
+            <c:spPr>
+              <a:solidFill>
+                <a:srgbClr val="001552"/>
+              </a:solidFill>
+            </c:spPr>
+          </c:dPt>
           <c:cat>
             <c:strRef>
               <c:f>Sheet1!$A$2:$A$4</c:f>
@@ -735,7 +765,7 @@
             <c:numRef>
               <c:f>Sheet1!$B$2:$B$4</c:f>
               <c:numCache>
-                <c:formatCode>#,##0.0</c:formatCode>
+                <c:formatCode>[$-409]#,##0.0</c:formatCode>
                 <c:ptCount val="3"/>
                 <c:pt idx="0">
                   <c:v>7.3</c:v>
@@ -751,7 +781,7 @@
           </c:val>
         </c:ser>
         <c:dLbls>
-          <c:numFmt formatCode="#,##0.0" sourceLinked="0"/>
+          <c:numFmt formatCode="[$-409]#,##0.0" sourceLinked="0"/>
           <c:txPr>
             <a:bodyPr/>
             <a:lstStyle/>
@@ -5410,7 +5440,7 @@
                 </a:solidFill>
                 <a:latin typeface="Calibri"/>
               </a:rPr>
-              <a:t>HR literature puts replacement cost between 0.5× and 2× annual salary, rising with specialisation and ramp time. The model applies 0.5× to Operations through 2.0× to managers.</a:t>
+              <a:t>HR literature puts replacement cost between 0.5× and 2× annual salary, rising with specialization and ramp time. The model applies 0.5× to Operations through 2.0× to managers.</a:t>
             </a:r>
           </a:p>
         </p:txBody>
@@ -8061,7 +8091,7 @@
                 </a:solidFill>
                 <a:latin typeface="Calibri"/>
               </a:rPr>
-              <a:t>Six or more exits from IC3 and the pay hypothesis is wrong. Stop, and re-open the segment as an organisational question.</a:t>
+              <a:t>Six or more exits from IC3 and the pay hypothesis is wrong. Stop, and re-open the segment as an organizational question.</a:t>
             </a:r>
           </a:p>
         </p:txBody>
@@ -8425,8 +8455,8 @@
         </p:nvSpPr>
         <p:spPr>
           <a:xfrm>
-            <a:off x="685800" y="2103120"/>
-            <a:ext cx="5349240" cy="3566160"/>
+            <a:off x="685800" y="2148840"/>
+            <a:ext cx="5349240" cy="2880360"/>
           </a:xfrm>
           <a:prstGeom prst="roundRect">
             <a:avLst>
@@ -8473,8 +8503,8 @@
         </p:nvSpPr>
         <p:spPr>
           <a:xfrm>
-            <a:off x="1005840" y="2377440"/>
-            <a:ext cx="4754880" cy="3017520"/>
+            <a:off x="1005840" y="2395728"/>
+            <a:ext cx="4754880" cy="2377440"/>
           </a:xfrm>
           <a:prstGeom prst="rect">
             <a:avLst/>
@@ -8560,8 +8590,8 @@
         </p:nvSpPr>
         <p:spPr>
           <a:xfrm>
-            <a:off x="6309360" y="2103120"/>
-            <a:ext cx="5166360" cy="3566160"/>
+            <a:off x="6309360" y="2148840"/>
+            <a:ext cx="5166360" cy="2880360"/>
           </a:xfrm>
           <a:prstGeom prst="roundRect">
             <a:avLst>
@@ -8608,8 +8638,8 @@
         </p:nvSpPr>
         <p:spPr>
           <a:xfrm>
-            <a:off x="6629400" y="2377440"/>
-            <a:ext cx="4617720" cy="3017520"/>
+            <a:off x="6629400" y="2395728"/>
+            <a:ext cx="4617720" cy="2377440"/>
           </a:xfrm>
           <a:prstGeom prst="rect">
             <a:avLst/>
@@ -8650,7 +8680,7 @@
                 </a:solidFill>
                 <a:latin typeface="Calibri"/>
               </a:rPr>
-              <a:t>The thresholds are calibrated on this organisation. A company with a different baseline needs them re-derived, not copied.</a:t>
+              <a:t>The thresholds are calibrated on this organization. A company with a different baseline needs them re-derived, not copied.</a:t>
             </a:r>
           </a:p>
           <a:p>
@@ -11698,7 +11728,7 @@
                 </a:solidFill>
                 <a:latin typeface="Calibri"/>
               </a:rPr>
-              <a:t>Pay, internal equity, and organisational. Three problems that look identical in an attrition report.</a:t>
+              <a:t>Pay, internal equity, and organizational. Three problems that look identical in an attrition report.</a:t>
             </a:r>
           </a:p>
         </p:txBody>
@@ -12741,7 +12771,7 @@
         <p:spPr>
           <a:xfrm>
             <a:off x="685800" y="4617720"/>
-            <a:ext cx="10820095" cy="1508760"/>
+            <a:ext cx="10820095" cy="1143000"/>
           </a:xfrm>
           <a:prstGeom prst="roundRect">
             <a:avLst>
@@ -12788,8 +12818,8 @@
         </p:nvSpPr>
         <p:spPr>
           <a:xfrm>
-            <a:off x="1051560" y="4892040"/>
-            <a:ext cx="10088575" cy="1051560"/>
+            <a:off x="1051560" y="4864608"/>
+            <a:ext cx="10088575" cy="868680"/>
           </a:xfrm>
           <a:prstGeom prst="rect">
             <a:avLst/>
@@ -13738,7 +13768,7 @@
         <p:spPr>
           <a:xfrm>
             <a:off x="685800" y="4617720"/>
-            <a:ext cx="10820095" cy="1508760"/>
+            <a:ext cx="10820095" cy="1143000"/>
           </a:xfrm>
           <a:prstGeom prst="roundRect">
             <a:avLst>
@@ -13785,8 +13815,8 @@
         </p:nvSpPr>
         <p:spPr>
           <a:xfrm>
-            <a:off x="1051560" y="4892040"/>
-            <a:ext cx="10088575" cy="1051560"/>
+            <a:off x="1051560" y="4864608"/>
+            <a:ext cx="10088575" cy="868680"/>
           </a:xfrm>
           <a:prstGeom prst="rect">
             <a:avLst/>
@@ -13965,7 +13995,7 @@
                 </a:solidFill>
                 <a:latin typeface="Calibri"/>
               </a:rPr>
-              <a:t>ORGANISATIONAL</a:t>
+              <a:t>ORGANIZATIONAL</a:t>
             </a:r>
           </a:p>
         </p:txBody>
@@ -14735,7 +14765,7 @@
         <p:spPr>
           <a:xfrm>
             <a:off x="685800" y="4617720"/>
-            <a:ext cx="10820095" cy="1508760"/>
+            <a:ext cx="10820095" cy="1143000"/>
           </a:xfrm>
           <a:prstGeom prst="roundRect">
             <a:avLst>
@@ -14782,8 +14812,8 @@
         </p:nvSpPr>
         <p:spPr>
           <a:xfrm>
-            <a:off x="1051560" y="4892040"/>
-            <a:ext cx="10088575" cy="1051560"/>
+            <a:off x="1051560" y="4864608"/>
+            <a:ext cx="10088575" cy="868680"/>
           </a:xfrm>
           <a:prstGeom prst="rect">
             <a:avLst/>

--- a/MPG_PeopleAnalytics_Executive.pptx
+++ b/MPG_PeopleAnalytics_Executive.pptx
@@ -4413,7 +4413,7 @@
         </p:nvSpPr>
         <p:spPr>
           <a:xfrm>
-            <a:off x="914400" y="5074920"/>
+            <a:off x="914400" y="4709160"/>
             <a:ext cx="10332720" cy="822960"/>
           </a:xfrm>
           <a:prstGeom prst="rect">
@@ -4456,6 +4456,80 @@
                 <a:latin typeface="Calibri"/>
               </a:rPr>
               <a:t>4,500 employees · 9 cities · 24 months · 746 segments scanned</a:t>
+            </a:r>
+          </a:p>
+        </p:txBody>
+      </p:sp>
+      <p:sp>
+        <p:nvSpPr>
+          <p:cNvPr id="6" name="TextBox 5"/>
+          <p:cNvSpPr txBox="1"/>
+          <p:nvPr/>
+        </p:nvSpPr>
+        <p:spPr>
+          <a:xfrm>
+            <a:off x="914400" y="5504688"/>
+            <a:ext cx="8046720" cy="731520"/>
+          </a:xfrm>
+          <a:prstGeom prst="rect">
+            <a:avLst/>
+          </a:prstGeom>
+          <a:noFill/>
+        </p:spPr>
+        <p:txBody>
+          <a:bodyPr wrap="square" anchor="t" lIns="0" rIns="0" tIns="0" bIns="0">
+            <a:spAutoFit/>
+          </a:bodyPr>
+          <a:lstStyle/>
+          <a:p>
+            <a:pPr algn="l">
+              <a:spcAft>
+                <a:spcPts val="0"/>
+              </a:spcAft>
+            </a:pPr>
+            <a:r>
+              <a:rPr sz="1050" b="0">
+                <a:solidFill>
+                  <a:srgbClr val="8FA6CC"/>
+                </a:solidFill>
+                <a:latin typeface="Calibri"/>
+              </a:rPr>
+              <a:t>Built on synthetic data, generated to a documented specification. Real compensation data is confidential — and because the anomalies were designed in advance, the analysis can be scored rather than asserted.</a:t>
+            </a:r>
+          </a:p>
+        </p:txBody>
+      </p:sp>
+      <p:sp>
+        <p:nvSpPr>
+          <p:cNvPr id="7" name="TextBox 6"/>
+          <p:cNvSpPr txBox="1"/>
+          <p:nvPr/>
+        </p:nvSpPr>
+        <p:spPr>
+          <a:xfrm>
+            <a:off x="914400" y="6053328"/>
+            <a:ext cx="10332720" cy="274320"/>
+          </a:xfrm>
+          <a:prstGeom prst="rect">
+            <a:avLst/>
+          </a:prstGeom>
+          <a:noFill/>
+        </p:spPr>
+        <p:txBody>
+          <a:bodyPr wrap="square" lIns="0" rIns="0" tIns="0" bIns="0">
+            <a:spAutoFit/>
+          </a:bodyPr>
+          <a:lstStyle/>
+          <a:p>
+            <a:r>
+              <a:rPr sz="1100">
+                <a:solidFill>
+                  <a:srgbClr val="9CBCE8"/>
+                </a:solidFill>
+                <a:latin typeface="Calibri"/>
+                <a:hlinkClick r:id="rId2"/>
+              </a:rPr>
+              <a:t>github.com/Alejandro-Tarazona/01_PeopleAnalytics</a:t>
             </a:r>
           </a:p>
         </p:txBody>
@@ -14886,10 +14960,10 @@
         <a:srgbClr val="F79646"/>
       </a:accent6>
       <a:hlink>
-        <a:srgbClr val="0000FF"/>
+        <a:srgbClr val="9CBCE8"/>
       </a:hlink>
       <a:folHlink>
-        <a:srgbClr val="800080"/>
+        <a:srgbClr val="9CBCE8"/>
       </a:folHlink>
     </a:clrScheme>
     <a:fontScheme name="Office">
@@ -15206,10 +15280,10 @@
         <a:srgbClr val="F79646"/>
       </a:accent6>
       <a:hlink>
-        <a:srgbClr val="0000FF"/>
+        <a:srgbClr val="9CBCE8"/>
       </a:hlink>
       <a:folHlink>
-        <a:srgbClr val="800080"/>
+        <a:srgbClr val="9CBCE8"/>
       </a:folHlink>
     </a:clrScheme>
     <a:fontScheme name="Office">

--- a/MPG_PeopleAnalytics_Executive.pptx
+++ b/MPG_PeopleAnalytics_Executive.pptx
@@ -21,6 +21,7 @@
     <p:sldId id="269" r:id="rId21"/>
     <p:sldId id="270" r:id="rId22"/>
     <p:sldId id="271" r:id="rId23"/>
+    <p:sldId id="272" r:id="rId24"/>
   </p:sldIdLst>
   <p:sldSz cx="12191695" cy="6858000" type="screen4x3"/>
   <p:notesSz cx="6858000" cy="9144000"/>
@@ -1278,6 +1279,76 @@
           <a:p>
             <a:r>
               <a:t>The recommendation is not to spend less for its own sake. It is that the blanket proposal spends where the evidence is not.</a:t>
+            </a:r>
+          </a:p>
+        </p:txBody>
+      </p:sp>
+      <p:sp>
+        <p:nvSpPr>
+          <p:cNvPr id="4" name="Slide Number Placeholder 3"/>
+          <p:cNvSpPr>
+            <a:spLocks noGrp="1"/>
+          </p:cNvSpPr>
+          <p:nvPr>
+            <p:ph type="sldNum" idx="5" sz="quarter"/>
+          </p:nvPr>
+        </p:nvSpPr>
+        <p:spPr/>
+      </p:sp>
+    </p:spTree>
+  </p:cSld>
+  <p:clrMapOvr>
+    <a:masterClrMapping/>
+  </p:clrMapOvr>
+</p:notes>
+</file>
+
+<file path=ppt/notesSlides/notesSlide2.xml><?xml version="1.0" encoding="utf-8"?>
+<p:notes xmlns:a="http://schemas.openxmlformats.org/drawingml/2006/main" xmlns:p="http://schemas.openxmlformats.org/presentationml/2006/main" xmlns:r="http://schemas.openxmlformats.org/officeDocument/2006/relationships">
+  <p:cSld>
+    <p:spTree>
+      <p:nvGrpSpPr>
+        <p:cNvPr id="1" name=""/>
+        <p:cNvGrpSpPr/>
+        <p:nvPr/>
+      </p:nvGrpSpPr>
+      <p:grpSpPr>
+        <a:xfrm>
+          <a:off x="0" y="0"/>
+          <a:ext cx="0" cy="0"/>
+          <a:chOff x="0" y="0"/>
+          <a:chExt cx="0" cy="0"/>
+        </a:xfrm>
+      </p:grpSpPr>
+      <p:sp>
+        <p:nvSpPr>
+          <p:cNvPr id="2" name="Slide Image Placeholder 1"/>
+          <p:cNvSpPr>
+            <a:spLocks noGrp="1"/>
+          </p:cNvSpPr>
+          <p:nvPr>
+            <p:ph type="sldImg" idx="2"/>
+          </p:nvPr>
+        </p:nvSpPr>
+        <p:spPr/>
+      </p:sp>
+      <p:sp>
+        <p:nvSpPr>
+          <p:cNvPr id="3" name="Notes Placeholder 2"/>
+          <p:cNvSpPr>
+            <a:spLocks noGrp="1"/>
+          </p:cNvSpPr>
+          <p:nvPr>
+            <p:ph type="body" idx="3" sz="quarter"/>
+          </p:nvPr>
+        </p:nvSpPr>
+        <p:spPr/>
+        <p:txBody>
+          <a:bodyPr/>
+          <a:lstStyle/>
+          <a:p>
+            <a:r>
+              <a:t>Annex. Not part of the argument - it exists so anyone who wants to see the tool behind the numbers can reach it.</a:t>
             </a:r>
           </a:p>
         </p:txBody>
@@ -8787,6 +8858,293 @@
                 <a:latin typeface="Calibri"/>
               </a:rPr>
               <a:t>And it is why the recommendation is a pilot rather than a rollout.</a:t>
+            </a:r>
+          </a:p>
+        </p:txBody>
+      </p:sp>
+    </p:spTree>
+  </p:cSld>
+  <p:clrMapOvr>
+    <a:masterClrMapping/>
+  </p:clrMapOvr>
+</p:sld>
+</file>
+
+<file path=ppt/slides/slide17.xml><?xml version="1.0" encoding="utf-8"?>
+<p:sld xmlns:a="http://schemas.openxmlformats.org/drawingml/2006/main" xmlns:p="http://schemas.openxmlformats.org/presentationml/2006/main" xmlns:r="http://schemas.openxmlformats.org/officeDocument/2006/relationships">
+  <p:cSld>
+    <p:spTree>
+      <p:nvGrpSpPr>
+        <p:cNvPr id="1" name=""/>
+        <p:cNvGrpSpPr/>
+        <p:nvPr/>
+      </p:nvGrpSpPr>
+      <p:grpSpPr/>
+      <p:sp>
+        <p:nvSpPr>
+          <p:cNvPr id="2" name="Rectangle 1"/>
+          <p:cNvSpPr/>
+          <p:nvPr/>
+        </p:nvSpPr>
+        <p:spPr>
+          <a:xfrm>
+            <a:off x="0" y="0"/>
+            <a:ext cx="12191695" cy="6858000"/>
+          </a:xfrm>
+          <a:prstGeom prst="rect">
+            <a:avLst/>
+          </a:prstGeom>
+          <a:solidFill>
+            <a:srgbClr val="F2F4F7"/>
+          </a:solidFill>
+          <a:ln>
+            <a:noFill/>
+          </a:ln>
+          <a:effectLst/>
+        </p:spPr>
+        <p:style>
+          <a:lnRef idx="1">
+            <a:schemeClr val="accent1"/>
+          </a:lnRef>
+          <a:fillRef idx="3">
+            <a:schemeClr val="accent1"/>
+          </a:fillRef>
+          <a:effectRef idx="2">
+            <a:schemeClr val="accent1"/>
+          </a:effectRef>
+          <a:fontRef idx="minor">
+            <a:schemeClr val="lt1"/>
+          </a:fontRef>
+        </p:style>
+        <p:txBody>
+          <a:bodyPr rtlCol="0" anchor="ctr"/>
+          <a:lstStyle/>
+          <a:p>
+            <a:pPr algn="ctr"/>
+          </a:p>
+        </p:txBody>
+      </p:sp>
+      <p:sp>
+        <p:nvSpPr>
+          <p:cNvPr id="3" name="TextBox 2"/>
+          <p:cNvSpPr txBox="1"/>
+          <p:nvPr/>
+        </p:nvSpPr>
+        <p:spPr>
+          <a:xfrm>
+            <a:off x="685800" y="475488"/>
+            <a:ext cx="10820095" cy="914400"/>
+          </a:xfrm>
+          <a:prstGeom prst="rect">
+            <a:avLst/>
+          </a:prstGeom>
+          <a:noFill/>
+        </p:spPr>
+        <p:txBody>
+          <a:bodyPr wrap="square" anchor="t" lIns="0" rIns="0" tIns="0" bIns="0">
+            <a:spAutoFit/>
+          </a:bodyPr>
+          <a:lstStyle/>
+          <a:p>
+            <a:pPr algn="l">
+              <a:spcAft>
+                <a:spcPts val="0"/>
+              </a:spcAft>
+            </a:pPr>
+            <a:r>
+              <a:rPr sz="3200" b="1">
+                <a:solidFill>
+                  <a:srgbClr val="001552"/>
+                </a:solidFill>
+                <a:latin typeface="Cambria"/>
+              </a:rPr>
+              <a:t>Annex — the report this came from</a:t>
+            </a:r>
+          </a:p>
+        </p:txBody>
+      </p:sp>
+      <p:pic>
+        <p:nvPicPr>
+          <p:cNvPr id="4" name="Picture 3" descr="report-what-to-do.png"/>
+          <p:cNvPicPr>
+            <a:picLocks noChangeAspect="1"/>
+          </p:cNvPicPr>
+          <p:nvPr/>
+        </p:nvPicPr>
+        <p:blipFill>
+          <a:blip r:embed="rId2"/>
+          <a:stretch>
+            <a:fillRect/>
+          </a:stretch>
+        </p:blipFill>
+        <p:spPr>
+          <a:xfrm>
+            <a:off x="685800" y="1965960"/>
+            <a:ext cx="7223760" cy="4082995"/>
+          </a:xfrm>
+          <a:prstGeom prst="rect">
+            <a:avLst/>
+          </a:prstGeom>
+          <a:ln w="9525">
+            <a:solidFill>
+              <a:srgbClr val="E4E7EC"/>
+            </a:solidFill>
+          </a:ln>
+        </p:spPr>
+      </p:pic>
+      <p:sp>
+        <p:nvSpPr>
+          <p:cNvPr id="5" name="TextBox 4"/>
+          <p:cNvSpPr txBox="1"/>
+          <p:nvPr/>
+        </p:nvSpPr>
+        <p:spPr>
+          <a:xfrm>
+            <a:off x="8229600" y="1965960"/>
+            <a:ext cx="3291840" cy="3291840"/>
+          </a:xfrm>
+          <a:prstGeom prst="rect">
+            <a:avLst/>
+          </a:prstGeom>
+          <a:noFill/>
+        </p:spPr>
+        <p:txBody>
+          <a:bodyPr wrap="square" anchor="t" lIns="0" rIns="0" tIns="0" bIns="0">
+            <a:spAutoFit/>
+          </a:bodyPr>
+          <a:lstStyle/>
+          <a:p>
+            <a:pPr algn="l">
+              <a:spcAft>
+                <a:spcPts val="600"/>
+              </a:spcAft>
+            </a:pPr>
+            <a:r>
+              <a:rPr sz="1500" b="1">
+                <a:solidFill>
+                  <a:srgbClr val="001552"/>
+                </a:solidFill>
+                <a:latin typeface="Calibri"/>
+              </a:rPr>
+              <a:t>Four pages</a:t>
+            </a:r>
+          </a:p>
+          <a:p>
+            <a:pPr algn="l">
+              <a:spcAft>
+                <a:spcPts val="1000"/>
+              </a:spcAft>
+            </a:pPr>
+            <a:r>
+              <a:rPr sz="1200" b="0">
+                <a:solidFill>
+                  <a:srgbClr val="475467"/>
+                </a:solidFill>
+                <a:latin typeface="Calibri"/>
+              </a:rPr>
+              <a:t>Global Overview · Where the exposure is · The Scan · What to do.</a:t>
+            </a:r>
+          </a:p>
+          <a:p>
+            <a:pPr algn="l">
+              <a:spcAft>
+                <a:spcPts val="1400"/>
+              </a:spcAft>
+            </a:pPr>
+            <a:r>
+              <a:rPr sz="1200" b="0">
+                <a:solidFill>
+                  <a:srgbClr val="475467"/>
+                </a:solidFill>
+                <a:latin typeface="Calibri"/>
+              </a:rPr>
+              <a:t>Each carries an information panel stating what the page is for, which figures it shows, and what is deliberately left off it. The export page behind them is the contract a test suite reads.</a:t>
+            </a:r>
+          </a:p>
+          <a:p>
+            <a:pPr algn="l">
+              <a:spcAft>
+                <a:spcPts val="0"/>
+              </a:spcAft>
+            </a:pPr>
+            <a:r>
+              <a:rPr sz="1150" b="0">
+                <a:solidFill>
+                  <a:srgbClr val="667085"/>
+                </a:solidFill>
+                <a:latin typeface="Calibri"/>
+              </a:rPr>
+              <a:t>The screen shown is What to do — the fourth page, and the one this deck's recommendation is drawn from.</a:t>
+            </a:r>
+          </a:p>
+        </p:txBody>
+      </p:sp>
+      <p:sp>
+        <p:nvSpPr>
+          <p:cNvPr id="6" name="TextBox 5"/>
+          <p:cNvSpPr txBox="1"/>
+          <p:nvPr/>
+        </p:nvSpPr>
+        <p:spPr>
+          <a:xfrm>
+            <a:off x="8229600" y="5440680"/>
+            <a:ext cx="3291840" cy="274320"/>
+          </a:xfrm>
+          <a:prstGeom prst="rect">
+            <a:avLst/>
+          </a:prstGeom>
+          <a:noFill/>
+        </p:spPr>
+        <p:txBody>
+          <a:bodyPr wrap="square" lIns="0" rIns="0" tIns="0" bIns="0">
+            <a:spAutoFit/>
+          </a:bodyPr>
+          <a:lstStyle/>
+          <a:p>
+            <a:r>
+              <a:rPr sz="1200">
+                <a:solidFill>
+                  <a:srgbClr val="3E72C4"/>
+                </a:solidFill>
+                <a:latin typeface="Calibri"/>
+                <a:hlinkClick r:id="rId3"/>
+              </a:rPr>
+              <a:t>The repository</a:t>
+            </a:r>
+          </a:p>
+        </p:txBody>
+      </p:sp>
+      <p:sp>
+        <p:nvSpPr>
+          <p:cNvPr id="7" name="TextBox 6"/>
+          <p:cNvSpPr txBox="1"/>
+          <p:nvPr/>
+        </p:nvSpPr>
+        <p:spPr>
+          <a:xfrm>
+            <a:off x="8229600" y="5806440"/>
+            <a:ext cx="3291840" cy="274320"/>
+          </a:xfrm>
+          <a:prstGeom prst="rect">
+            <a:avLst/>
+          </a:prstGeom>
+          <a:noFill/>
+        </p:spPr>
+        <p:txBody>
+          <a:bodyPr wrap="square" lIns="0" rIns="0" tIns="0" bIns="0">
+            <a:spAutoFit/>
+          </a:bodyPr>
+          <a:lstStyle/>
+          <a:p>
+            <a:r>
+              <a:rPr sz="1200">
+                <a:solidFill>
+                  <a:srgbClr val="3E72C4"/>
+                </a:solidFill>
+                <a:latin typeface="Calibri"/>
+                <a:hlinkClick r:id="rId4"/>
+              </a:rPr>
+              <a:t>All four pages, with their panels (PDF)</a:t>
             </a:r>
           </a:p>
         </p:txBody>
